--- a/docs/floorguide__deck.pptx
+++ b/docs/floorguide__deck.pptx
@@ -1858,11 +1858,11 @@
         <p:spPr>
           <a:xfrm>
             <a:off x="3657600" y="2286000"/>
-            <a:ext cx="2514600" cy="1737360"/>
+            <a:ext cx="2514600" cy="1664208"/>
           </a:xfrm>
           <a:prstGeom prst="roundRect">
             <a:avLst>
-              <a:gd name="adj" fmla="val 5263"/>
+              <a:gd name="adj" fmla="val 5495"/>
             </a:avLst>
           </a:prstGeom>
           <a:solidFill>
@@ -1997,7 +1997,7 @@
         <p:spPr>
           <a:xfrm>
             <a:off x="3794760" y="2743200"/>
-            <a:ext cx="2240280" cy="1188720"/>
+            <a:ext cx="2240280" cy="1115568"/>
           </a:xfrm>
           <a:prstGeom prst="rect">
             <a:avLst/>
@@ -2115,11 +2115,11 @@
         <p:spPr>
           <a:xfrm>
             <a:off x="6355080" y="2286000"/>
-            <a:ext cx="2514600" cy="1737360"/>
+            <a:ext cx="2514600" cy="1664208"/>
           </a:xfrm>
           <a:prstGeom prst="roundRect">
             <a:avLst>
-              <a:gd name="adj" fmla="val 5263"/>
+              <a:gd name="adj" fmla="val 5495"/>
             </a:avLst>
           </a:prstGeom>
           <a:solidFill>
@@ -2254,7 +2254,7 @@
         <p:spPr>
           <a:xfrm>
             <a:off x="6492240" y="2743200"/>
-            <a:ext cx="2240280" cy="1188720"/>
+            <a:ext cx="2240280" cy="1115568"/>
           </a:xfrm>
           <a:prstGeom prst="rect">
             <a:avLst/>
@@ -2371,12 +2371,12 @@
         </p:nvSpPr>
         <p:spPr>
           <a:xfrm>
-            <a:off x="3657600" y="4160520"/>
-            <a:ext cx="2377440" cy="640080"/>
+            <a:off x="3657600" y="4069080"/>
+            <a:ext cx="2377440" cy="822960"/>
           </a:xfrm>
           <a:prstGeom prst="roundRect">
             <a:avLst>
-              <a:gd name="adj" fmla="val 11429"/>
+              <a:gd name="adj" fmla="val 8889"/>
             </a:avLst>
           </a:prstGeom>
           <a:solidFill>
@@ -2398,8 +2398,8 @@
         </p:nvSpPr>
         <p:spPr>
           <a:xfrm>
-            <a:off x="3794760" y="4233672"/>
-            <a:ext cx="2148840" cy="493776"/>
+            <a:off x="3794760" y="4142232"/>
+            <a:ext cx="2148840" cy="676656"/>
           </a:xfrm>
           <a:prstGeom prst="rect">
             <a:avLst/>
@@ -2432,7 +2432,7 @@
               <a:buNone/>
             </a:pPr>
             <a:r>
-              <a:rPr lang="en-US" sz="900" b="1" dirty="0">
+              <a:rPr lang="en-US" sz="850" b="1" dirty="0">
                 <a:solidFill>
                   <a:srgbClr val="1F2937"/>
                 </a:solidFill>
@@ -2440,7 +2440,7 @@
                 <a:ea typeface="Calibri" pitchFamily="34" charset="-122"/>
                 <a:cs typeface="Calibri" pitchFamily="34" charset="-120"/>
               </a:rPr>
-              <a:t>Minutes per question. A walk to the office. A guess between two documents that disagree.</a:t>
+              <a:t>Six questions a shift at about eight minutes each: a walk, a guess between documents that disagree. One missed filter change is a stopped press.</a:t>
             </a:r>
             <a:endParaRPr lang="en-US" sz="750" dirty="0"/>
           </a:p>
@@ -2454,8 +2454,8 @@
         </p:nvSpPr>
         <p:spPr>
           <a:xfrm>
-            <a:off x="6126480" y="4160520"/>
-            <a:ext cx="457200" cy="640080"/>
+            <a:off x="6126480" y="4069080"/>
+            <a:ext cx="457200" cy="822960"/>
           </a:xfrm>
           <a:prstGeom prst="roundRect">
             <a:avLst>
@@ -2481,8 +2481,8 @@
         </p:nvSpPr>
         <p:spPr>
           <a:xfrm>
-            <a:off x="6126480" y="4160520"/>
-            <a:ext cx="457200" cy="640080"/>
+            <a:off x="6126480" y="4069080"/>
+            <a:ext cx="457200" cy="822960"/>
           </a:xfrm>
           <a:prstGeom prst="rect">
             <a:avLst/>
@@ -2520,12 +2520,12 @@
         </p:nvSpPr>
         <p:spPr>
           <a:xfrm>
-            <a:off x="6675120" y="4160520"/>
-            <a:ext cx="2194560" cy="640080"/>
+            <a:off x="6675120" y="4069080"/>
+            <a:ext cx="2194560" cy="822960"/>
           </a:xfrm>
           <a:prstGeom prst="roundRect">
             <a:avLst>
-              <a:gd name="adj" fmla="val 11429"/>
+              <a:gd name="adj" fmla="val 8889"/>
             </a:avLst>
           </a:prstGeom>
           <a:solidFill>
@@ -2547,8 +2547,8 @@
         </p:nvSpPr>
         <p:spPr>
           <a:xfrm>
-            <a:off x="6812280" y="4233672"/>
-            <a:ext cx="1965960" cy="493776"/>
+            <a:off x="6812280" y="4142232"/>
+            <a:ext cx="1965960" cy="676656"/>
           </a:xfrm>
           <a:prstGeom prst="rect">
             <a:avLst/>
@@ -2581,7 +2581,7 @@
               <a:buNone/>
             </a:pPr>
             <a:r>
-              <a:rPr lang="en-US" sz="900" b="1" dirty="0">
+              <a:rPr lang="en-US" sz="850" b="1" dirty="0">
                 <a:solidFill>
                   <a:srgbClr val="1F2937"/>
                 </a:solidFill>
@@ -2589,7 +2589,7 @@
                 <a:ea typeface="Calibri" pitchFamily="34" charset="-122"/>
                 <a:cs typeface="Calibri" pitchFamily="34" charset="-120"/>
               </a:rPr>
-              <a:t>One question. One answer with its source. One button. The safety procedure always wins.</a:t>
+              <a:t>One question, one answer with its source, one button. About 40 minutes back per supervisor per shift, about 2,000 hours a year plant-wide. The safety procedure always wins.</a:t>
             </a:r>
             <a:endParaRPr lang="en-US" sz="750" dirty="0"/>
           </a:p>
